--- a/submission/CarbonPilot_submission_deck.pptx
+++ b/submission/CarbonPilot_submission_deck.pptx
@@ -5696,7 +5696,7 @@
                 </a:solidFill>
                 <a:latin typeface="IBM Plex Mono"/>
               </a:rPr>
-              <a:t>105</a:t>
+              <a:t>138</a:t>
             </a:r>
           </a:p>
         </p:txBody>
@@ -12869,7 +12869,7 @@
                 </a:solidFill>
                 <a:latin typeface="Source Serif 4"/>
               </a:rPr>
-              <a:t>105 tests. A smoke test that fails on a working-looking key. One process.</a:t>
+              <a:t>138 tests. A smoke test that fails on a working-looking key. One process.</a:t>
             </a:r>
           </a:p>
         </p:txBody>
@@ -13023,7 +13023,7 @@
                 </a:solidFill>
                 <a:latin typeface="Inter"/>
               </a:rPr>
-              <a:t>A projection plus its saving equals the baseline. Constraint search only ever returns scenarios that satisfy the constraints. 105 tests, runnable without credentials.</a:t>
+              <a:t>A projection plus its saving equals the baseline. Constraint search only ever returns scenarios that satisfy the constraints. 138 tests, runnable without credentials.</a:t>
             </a:r>
           </a:p>
         </p:txBody>
@@ -13326,7 +13326,7 @@
                 </a:solidFill>
                 <a:latin typeface="Inter"/>
               </a:rPr>
-              <a:t>Verified 2026-10-04: backend 32s · frontend typecheck + static export ~1 min · preflight READY, 13 OK.</a:t>
+              <a:t>Verified 2026-10-15: backend 36s · frontend typecheck + static export ~1 min · preflight READY — agent answers by real Gemini; two honest warnings: 16 approved actions on the plan, curated-only factors (no Climatiq key).</a:t>
             </a:r>
           </a:p>
         </p:txBody>
